--- a/reports/Mark_Villola_Technical_Presentation_with SpeakerNotes.pptx
+++ b/reports/Mark_Villola_Technical_Presentation_with SpeakerNotes.pptx
@@ -2840,7 +2840,7 @@
                   <a:srgbClr val="BFDBFE"/>
                 </a:solidFill>
               </a:rPr>
-              <a:t>AIM Postgraduate Diploma in AI &amp; ML  |  Pillar 5 Capstone  |  March 2025</a:t>
+              <a:t>AIM Postgraduate Diploma in AI &amp; ML  |  Pillar 5 Capstone  |  March 2026</a:t>
             </a:r>
             <a:endParaRPr lang="en-US" sz="1000" dirty="0"/>
           </a:p>
